--- a/material/Proyecto-docente-acotar-alcance.pptx
+++ b/material/Proyecto-docente-acotar-alcance.pptx
@@ -534,7 +534,7 @@
           <a:p>
             <a:r>
               <a:rPr lang="en-US" dirty="0"/>
-              <a:t/>
+              <a:t>Presentar el propósito: mostrar con un caso real cómo se acota un alcance antes del anteproyecto. El proyecto del docente crece una pieza por sesión, a la vista de todos. 2 minutos.</a:t>
             </a:r>
             <a:endParaRPr lang="en-US" dirty="0"/>
           </a:p>
@@ -1766,7 +1766,7 @@
           <a:p>
             <a:r>
               <a:rPr lang="en-US" dirty="0"/>
-              <a:t/>
+              <a:t>Honestidad metodológica: estas disciplinas vienen de equipos grandes y proyectos largos. Decir qué se toma y qué no para un equipo de tres en un semestre.</a:t>
             </a:r>
             <a:endParaRPr lang="en-US" dirty="0"/>
           </a:p>
@@ -2030,7 +2030,7 @@
           <a:p>
             <a:r>
               <a:rPr lang="en-US" dirty="0"/>
-              <a:t/>
+              <a:t>El caso completo: el alcance del proyecto del docente con el porqué de cada recorte y lo que cada recorte costó. Es el modelo de lo que se espera en el anteproyecto.</a:t>
             </a:r>
             <a:endParaRPr lang="en-US" dirty="0"/>
           </a:p>
@@ -2822,7 +2822,7 @@
           <a:p>
             <a:r>
               <a:rPr lang="en-US" dirty="0"/>
-              <a:t/>
+              <a:t>Leer la frase en voz alta y cerrar. La entrega 1 de los equipos es su alcance en una página; la próxima entrega es arquitectura y especificación. 1 minuto.</a:t>
             </a:r>
             <a:endParaRPr lang="en-US" dirty="0"/>
           </a:p>
@@ -2910,7 +2910,7 @@
           <a:p>
             <a:r>
               <a:rPr lang="en-US" dirty="0"/>
-              <a:t/>
+              <a:t>Lo que hay que aprender hoy: el error de partida, el doble diamante, el punto de vista, las historias con criterios de aceptación y el corte vertical. Cada idea se muestra aplicada al caso de las entradas.</a:t>
             </a:r>
             <a:endParaRPr lang="en-US" dirty="0"/>
           </a:p>
@@ -4412,7 +4412,7 @@
         </p:nvSpPr>
         <p:spPr>
           <a:xfrm>
-            <a:off x="566928" y="3291840"/>
+            <a:off x="566928" y="3246120"/>
             <a:ext cx="11057839" cy="365760"/>
           </a:xfrm>
           <a:prstGeom prst="rect">
@@ -4454,8 +4454,8 @@
         </p:nvSpPr>
         <p:spPr>
           <a:xfrm>
-            <a:off x="566928" y="3794760"/>
-            <a:ext cx="11057839" cy="713232"/>
+            <a:off x="566928" y="3703320"/>
+            <a:ext cx="11057839" cy="621792"/>
           </a:xfrm>
           <a:prstGeom prst="rect">
             <a:avLst/>
@@ -4479,8 +4479,8 @@
         </p:nvSpPr>
         <p:spPr>
           <a:xfrm>
-            <a:off x="822960" y="3794760"/>
-            <a:ext cx="2651760" cy="713232"/>
+            <a:off x="822960" y="3703320"/>
+            <a:ext cx="2651760" cy="621792"/>
           </a:xfrm>
           <a:prstGeom prst="rect">
             <a:avLst/>
@@ -4518,8 +4518,8 @@
         </p:nvSpPr>
         <p:spPr>
           <a:xfrm>
-            <a:off x="3584448" y="3941064"/>
-            <a:ext cx="7765999" cy="457200"/>
+            <a:off x="3584448" y="3703320"/>
+            <a:ext cx="7765999" cy="621792"/>
           </a:xfrm>
           <a:prstGeom prst="rect">
             <a:avLst/>
@@ -4528,13 +4528,10 @@
           <a:ln/>
         </p:spPr>
         <p:txBody>
-          <a:bodyPr wrap="square" lIns="0" tIns="0" rIns="0" bIns="0" rtlCol="0" anchor="t"/>
+          <a:bodyPr wrap="square" lIns="0" tIns="0" rIns="0" bIns="0" rtlCol="0" anchor="ctr"/>
           <a:lstStyle/>
           <a:p>
             <a:pPr indent="0" marL="0">
-              <a:lnSpc>
-                <a:spcPct val="124000"/>
-              </a:lnSpc>
               <a:buNone/>
             </a:pPr>
             <a:r>
@@ -4560,8 +4557,8 @@
         </p:nvSpPr>
         <p:spPr>
           <a:xfrm>
-            <a:off x="566928" y="4617720"/>
-            <a:ext cx="11057839" cy="713232"/>
+            <a:off x="566928" y="4434840"/>
+            <a:ext cx="11057839" cy="621792"/>
           </a:xfrm>
           <a:prstGeom prst="rect">
             <a:avLst/>
@@ -4585,8 +4582,8 @@
         </p:nvSpPr>
         <p:spPr>
           <a:xfrm>
-            <a:off x="822960" y="4617720"/>
-            <a:ext cx="2651760" cy="713232"/>
+            <a:off x="822960" y="4434840"/>
+            <a:ext cx="2651760" cy="621792"/>
           </a:xfrm>
           <a:prstGeom prst="rect">
             <a:avLst/>
@@ -4624,8 +4621,8 @@
         </p:nvSpPr>
         <p:spPr>
           <a:xfrm>
-            <a:off x="3584448" y="4764024"/>
-            <a:ext cx="7765999" cy="457200"/>
+            <a:off x="3584448" y="4434840"/>
+            <a:ext cx="7765999" cy="621792"/>
           </a:xfrm>
           <a:prstGeom prst="rect">
             <a:avLst/>
@@ -4634,13 +4631,10 @@
           <a:ln/>
         </p:spPr>
         <p:txBody>
-          <a:bodyPr wrap="square" lIns="0" tIns="0" rIns="0" bIns="0" rtlCol="0" anchor="t"/>
+          <a:bodyPr wrap="square" lIns="0" tIns="0" rIns="0" bIns="0" rtlCol="0" anchor="ctr"/>
           <a:lstStyle/>
           <a:p>
             <a:pPr indent="0" marL="0">
-              <a:lnSpc>
-                <a:spcPct val="124000"/>
-              </a:lnSpc>
               <a:buNone/>
             </a:pPr>
             <a:r>
@@ -4666,8 +4660,8 @@
         </p:nvSpPr>
         <p:spPr>
           <a:xfrm>
-            <a:off x="566928" y="5440680"/>
-            <a:ext cx="11057839" cy="713232"/>
+            <a:off x="566928" y="5166360"/>
+            <a:ext cx="11057839" cy="621792"/>
           </a:xfrm>
           <a:prstGeom prst="rect">
             <a:avLst/>
@@ -4691,8 +4685,8 @@
         </p:nvSpPr>
         <p:spPr>
           <a:xfrm>
-            <a:off x="822960" y="5440680"/>
-            <a:ext cx="2651760" cy="713232"/>
+            <a:off x="822960" y="5166360"/>
+            <a:ext cx="2651760" cy="621792"/>
           </a:xfrm>
           <a:prstGeom prst="rect">
             <a:avLst/>
@@ -4730,8 +4724,8 @@
         </p:nvSpPr>
         <p:spPr>
           <a:xfrm>
-            <a:off x="3584448" y="5586984"/>
-            <a:ext cx="7765999" cy="457200"/>
+            <a:off x="3584448" y="5166360"/>
+            <a:ext cx="7765999" cy="621792"/>
           </a:xfrm>
           <a:prstGeom prst="rect">
             <a:avLst/>
@@ -4740,13 +4734,10 @@
           <a:ln/>
         </p:spPr>
         <p:txBody>
-          <a:bodyPr wrap="square" lIns="0" tIns="0" rIns="0" bIns="0" rtlCol="0" anchor="t"/>
+          <a:bodyPr wrap="square" lIns="0" tIns="0" rIns="0" bIns="0" rtlCol="0" anchor="ctr"/>
           <a:lstStyle/>
           <a:p>
             <a:pPr indent="0" marL="0">
-              <a:lnSpc>
-                <a:spcPct val="124000"/>
-              </a:lnSpc>
               <a:buNone/>
             </a:pPr>
             <a:r>
@@ -4772,8 +4763,8 @@
         </p:nvSpPr>
         <p:spPr>
           <a:xfrm>
-            <a:off x="566928" y="6309360"/>
-            <a:ext cx="11057839" cy="365760"/>
+            <a:off x="566928" y="5943600"/>
+            <a:ext cx="11057839" cy="274320"/>
           </a:xfrm>
           <a:prstGeom prst="rect">
             <a:avLst/>
@@ -6488,7 +6479,7 @@
         <p:spPr>
           <a:xfrm>
             <a:off x="841248" y="2880360"/>
-            <a:ext cx="7765999" cy="411480"/>
+            <a:ext cx="10509199" cy="411480"/>
           </a:xfrm>
           <a:prstGeom prst="rect">
             <a:avLst/>
@@ -6630,7 +6621,7 @@
         <p:spPr>
           <a:xfrm>
             <a:off x="841248" y="4023360"/>
-            <a:ext cx="7765999" cy="411480"/>
+            <a:ext cx="10509199" cy="411480"/>
           </a:xfrm>
           <a:prstGeom prst="rect">
             <a:avLst/>
@@ -6779,7 +6770,7 @@
         <p:spPr>
           <a:xfrm>
             <a:off x="841248" y="5166360"/>
-            <a:ext cx="7765999" cy="411480"/>
+            <a:ext cx="10509199" cy="411480"/>
           </a:xfrm>
           <a:prstGeom prst="rect">
             <a:avLst/>
@@ -7308,7 +7299,7 @@
         <p:spPr>
           <a:xfrm>
             <a:off x="566928" y="4023360"/>
-            <a:ext cx="11057839" cy="1371600"/>
+            <a:ext cx="11057839" cy="1097280"/>
           </a:xfrm>
           <a:prstGeom prst="rect">
             <a:avLst/>
@@ -7339,8 +7330,8 @@
         </p:nvSpPr>
         <p:spPr>
           <a:xfrm>
-            <a:off x="841248" y="4224528"/>
-            <a:ext cx="10509199" cy="1005840"/>
+            <a:off x="841248" y="4169664"/>
+            <a:ext cx="10509199" cy="868680"/>
           </a:xfrm>
           <a:prstGeom prst="rect">
             <a:avLst/>
@@ -7468,8 +7459,8 @@
         </p:nvSpPr>
         <p:spPr>
           <a:xfrm>
-            <a:off x="566928" y="5440680"/>
-            <a:ext cx="11057839" cy="914400"/>
+            <a:off x="566928" y="5212080"/>
+            <a:ext cx="11057839" cy="1024128"/>
           </a:xfrm>
           <a:prstGeom prst="rect">
             <a:avLst/>
@@ -7508,7 +7499,7 @@
         </p:blipFill>
         <p:spPr>
           <a:xfrm>
-            <a:off x="804672" y="5660136"/>
+            <a:off x="804672" y="5431536"/>
             <a:ext cx="237744" cy="237744"/>
           </a:xfrm>
           <a:prstGeom prst="rect">
@@ -7524,7 +7515,7 @@
         </p:nvSpPr>
         <p:spPr>
           <a:xfrm>
-            <a:off x="1133856" y="5632704"/>
+            <a:off x="1133856" y="5404104"/>
             <a:ext cx="10234879" cy="292608"/>
           </a:xfrm>
           <a:prstGeom prst="rect">
@@ -7563,8 +7554,8 @@
         </p:nvSpPr>
         <p:spPr>
           <a:xfrm>
-            <a:off x="804672" y="5879592"/>
-            <a:ext cx="10582351" cy="384048"/>
+            <a:off x="804672" y="5669280"/>
+            <a:ext cx="10582351" cy="457200"/>
           </a:xfrm>
           <a:prstGeom prst="rect">
             <a:avLst/>
@@ -10482,8 +10473,8 @@
         </p:nvSpPr>
         <p:spPr>
           <a:xfrm>
-            <a:off x="566928" y="2423160"/>
-            <a:ext cx="4846320" cy="457200"/>
+            <a:off x="566928" y="2697480"/>
+            <a:ext cx="4846320" cy="438912"/>
           </a:xfrm>
           <a:prstGeom prst="rect">
             <a:avLst/>
@@ -10507,8 +10498,8 @@
         </p:nvSpPr>
         <p:spPr>
           <a:xfrm>
-            <a:off x="749808" y="2423160"/>
-            <a:ext cx="4572000" cy="457200"/>
+            <a:off x="749808" y="2697480"/>
+            <a:ext cx="4572000" cy="438912"/>
           </a:xfrm>
           <a:prstGeom prst="rect">
             <a:avLst/>
@@ -10546,8 +10537,8 @@
         </p:nvSpPr>
         <p:spPr>
           <a:xfrm>
-            <a:off x="566928" y="2990088"/>
-            <a:ext cx="4846320" cy="457200"/>
+            <a:off x="566928" y="3246120"/>
+            <a:ext cx="4846320" cy="438912"/>
           </a:xfrm>
           <a:prstGeom prst="rect">
             <a:avLst/>
@@ -10571,8 +10562,8 @@
         </p:nvSpPr>
         <p:spPr>
           <a:xfrm>
-            <a:off x="749808" y="2990088"/>
-            <a:ext cx="4572000" cy="457200"/>
+            <a:off x="749808" y="3246120"/>
+            <a:ext cx="4572000" cy="438912"/>
           </a:xfrm>
           <a:prstGeom prst="rect">
             <a:avLst/>
@@ -10610,8 +10601,8 @@
         </p:nvSpPr>
         <p:spPr>
           <a:xfrm>
-            <a:off x="566928" y="3557016"/>
-            <a:ext cx="4846320" cy="457200"/>
+            <a:off x="566928" y="3794760"/>
+            <a:ext cx="4846320" cy="438912"/>
           </a:xfrm>
           <a:prstGeom prst="rect">
             <a:avLst/>
@@ -10635,8 +10626,8 @@
         </p:nvSpPr>
         <p:spPr>
           <a:xfrm>
-            <a:off x="749808" y="3557016"/>
-            <a:ext cx="4572000" cy="457200"/>
+            <a:off x="749808" y="3794760"/>
+            <a:ext cx="4572000" cy="438912"/>
           </a:xfrm>
           <a:prstGeom prst="rect">
             <a:avLst/>
@@ -10674,7 +10665,7 @@
         </p:nvSpPr>
         <p:spPr>
           <a:xfrm>
-            <a:off x="566928" y="2057400"/>
+            <a:off x="566928" y="2331720"/>
             <a:ext cx="4846320" cy="274320"/>
           </a:xfrm>
           <a:prstGeom prst="rect">
@@ -10713,8 +10704,8 @@
         </p:nvSpPr>
         <p:spPr>
           <a:xfrm>
-            <a:off x="1024128" y="2560320"/>
-            <a:ext cx="3931920" cy="1463040"/>
+            <a:off x="1024128" y="2788920"/>
+            <a:ext cx="3931920" cy="1399032"/>
           </a:xfrm>
           <a:prstGeom prst="line">
             <a:avLst/>
@@ -10736,8 +10727,8 @@
         </p:nvSpPr>
         <p:spPr>
           <a:xfrm flipH="1">
-            <a:off x="1024128" y="2560320"/>
-            <a:ext cx="3931920" cy="1463040"/>
+            <a:off x="1024128" y="2788920"/>
+            <a:ext cx="3931920" cy="1399032"/>
           </a:xfrm>
           <a:prstGeom prst="line">
             <a:avLst/>
@@ -10759,8 +10750,8 @@
         </p:nvSpPr>
         <p:spPr>
           <a:xfrm>
-            <a:off x="566928" y="4224528"/>
-            <a:ext cx="4846320" cy="548640"/>
+            <a:off x="566928" y="4315968"/>
+            <a:ext cx="4846320" cy="502920"/>
           </a:xfrm>
           <a:prstGeom prst="rect">
             <a:avLst/>
@@ -10801,8 +10792,8 @@
         </p:nvSpPr>
         <p:spPr>
           <a:xfrm>
-            <a:off x="6510528" y="2423160"/>
-            <a:ext cx="5111496" cy="457200"/>
+            <a:off x="6510528" y="2697480"/>
+            <a:ext cx="5111496" cy="438912"/>
           </a:xfrm>
           <a:prstGeom prst="rect">
             <a:avLst/>
@@ -10826,8 +10817,8 @@
         </p:nvSpPr>
         <p:spPr>
           <a:xfrm>
-            <a:off x="6693408" y="2423160"/>
-            <a:ext cx="2743200" cy="457200"/>
+            <a:off x="6693408" y="2697480"/>
+            <a:ext cx="2743200" cy="438912"/>
           </a:xfrm>
           <a:prstGeom prst="rect">
             <a:avLst/>
@@ -10865,8 +10856,8 @@
         </p:nvSpPr>
         <p:spPr>
           <a:xfrm>
-            <a:off x="6510528" y="2990088"/>
-            <a:ext cx="5111496" cy="457200"/>
+            <a:off x="6510528" y="3246120"/>
+            <a:ext cx="5111496" cy="438912"/>
           </a:xfrm>
           <a:prstGeom prst="rect">
             <a:avLst/>
@@ -10890,8 +10881,8 @@
         </p:nvSpPr>
         <p:spPr>
           <a:xfrm>
-            <a:off x="6693408" y="2990088"/>
-            <a:ext cx="2743200" cy="457200"/>
+            <a:off x="6693408" y="3246120"/>
+            <a:ext cx="2743200" cy="438912"/>
           </a:xfrm>
           <a:prstGeom prst="rect">
             <a:avLst/>
@@ -10929,8 +10920,8 @@
         </p:nvSpPr>
         <p:spPr>
           <a:xfrm>
-            <a:off x="6510528" y="3557016"/>
-            <a:ext cx="5111496" cy="457200"/>
+            <a:off x="6510528" y="3794760"/>
+            <a:ext cx="5111496" cy="438912"/>
           </a:xfrm>
           <a:prstGeom prst="rect">
             <a:avLst/>
@@ -10954,8 +10945,8 @@
         </p:nvSpPr>
         <p:spPr>
           <a:xfrm>
-            <a:off x="6693408" y="3557016"/>
-            <a:ext cx="2743200" cy="457200"/>
+            <a:off x="6693408" y="3794760"/>
+            <a:ext cx="2743200" cy="438912"/>
           </a:xfrm>
           <a:prstGeom prst="rect">
             <a:avLst/>
@@ -10993,7 +10984,7 @@
         </p:nvSpPr>
         <p:spPr>
           <a:xfrm>
-            <a:off x="6510528" y="2057400"/>
+            <a:off x="6510528" y="2331720"/>
             <a:ext cx="5111496" cy="274320"/>
           </a:xfrm>
           <a:prstGeom prst="rect">
@@ -11032,8 +11023,8 @@
         </p:nvSpPr>
         <p:spPr>
           <a:xfrm>
-            <a:off x="9802368" y="2377440"/>
-            <a:ext cx="1371600" cy="1636776"/>
+            <a:off x="9802368" y="2651760"/>
+            <a:ext cx="1371600" cy="1581912"/>
           </a:xfrm>
           <a:prstGeom prst="rect">
             <a:avLst/>
@@ -11054,8 +11045,8 @@
         </p:nvSpPr>
         <p:spPr>
           <a:xfrm>
-            <a:off x="6510528" y="4224528"/>
-            <a:ext cx="5111496" cy="548640"/>
+            <a:off x="6510528" y="4315968"/>
+            <a:ext cx="5111496" cy="502920"/>
           </a:xfrm>
           <a:prstGeom prst="rect">
             <a:avLst/>
@@ -11096,7 +11087,7 @@
         </p:nvSpPr>
         <p:spPr>
           <a:xfrm>
-            <a:off x="566928" y="4937760"/>
+            <a:off x="566928" y="4983480"/>
             <a:ext cx="11057839" cy="1005840"/>
           </a:xfrm>
           <a:prstGeom prst="rect">
@@ -11128,7 +11119,7 @@
         </p:nvSpPr>
         <p:spPr>
           <a:xfrm>
-            <a:off x="950976" y="5157216"/>
+            <a:off x="950976" y="5202936"/>
             <a:ext cx="10289743" cy="566928"/>
           </a:xfrm>
           <a:prstGeom prst="rect">
@@ -15625,7 +15616,7 @@
           </p:nvPr>
         </p:nvGraphicFramePr>
         <p:xfrm>
-          <a:off x="566928" y="2468880"/>
+          <a:off x="566928" y="2423160"/>
           <a:ext cx="11057839" cy="914400"/>
         </p:xfrm>
         <a:graphic>
@@ -15774,7 +15765,7 @@
                   </a:tcPr>
                 </a:tc>
               </a:tr>
-              <a:tr h="608076">
+              <a:tr h="562356">
                 <a:tc>
                   <a:txBody>
                     <a:bodyPr/>
@@ -15912,7 +15903,7 @@
                   </a:tcPr>
                 </a:tc>
               </a:tr>
-              <a:tr h="608076">
+              <a:tr h="562356">
                 <a:tc>
                   <a:txBody>
                     <a:bodyPr/>
@@ -16050,7 +16041,7 @@
                   </a:tcPr>
                 </a:tc>
               </a:tr>
-              <a:tr h="608076">
+              <a:tr h="562356">
                 <a:tc>
                   <a:txBody>
                     <a:bodyPr/>
@@ -16188,7 +16179,7 @@
                   </a:tcPr>
                 </a:tc>
               </a:tr>
-              <a:tr h="608076">
+              <a:tr h="562356">
                 <a:tc>
                   <a:txBody>
                     <a:bodyPr/>
@@ -16338,8 +16329,8 @@
         </p:nvSpPr>
         <p:spPr>
           <a:xfrm>
-            <a:off x="548640" y="2450592"/>
-            <a:ext cx="11094415" cy="2779776"/>
+            <a:off x="548640" y="2404872"/>
+            <a:ext cx="11094415" cy="2596896"/>
           </a:xfrm>
           <a:prstGeom prst="rect">
             <a:avLst/>
@@ -16360,7 +16351,7 @@
         </p:nvSpPr>
         <p:spPr>
           <a:xfrm>
-            <a:off x="566928" y="5440680"/>
+            <a:off x="566928" y="5166360"/>
             <a:ext cx="11057839" cy="868680"/>
           </a:xfrm>
           <a:prstGeom prst="rect">
@@ -16400,7 +16391,7 @@
         </p:blipFill>
         <p:spPr>
           <a:xfrm>
-            <a:off x="804672" y="5660136"/>
+            <a:off x="804672" y="5385816"/>
             <a:ext cx="237744" cy="237744"/>
           </a:xfrm>
           <a:prstGeom prst="rect">
@@ -16416,7 +16407,7 @@
         </p:nvSpPr>
         <p:spPr>
           <a:xfrm>
-            <a:off x="1133856" y="5632704"/>
+            <a:off x="1133856" y="5358384"/>
             <a:ext cx="10234879" cy="292608"/>
           </a:xfrm>
           <a:prstGeom prst="rect">
@@ -16455,7 +16446,7 @@
         </p:nvSpPr>
         <p:spPr>
           <a:xfrm>
-            <a:off x="804672" y="5916168"/>
+            <a:off x="804672" y="5641848"/>
             <a:ext cx="10582351" cy="365760"/>
           </a:xfrm>
           <a:prstGeom prst="rect">
@@ -20024,7 +20015,7 @@
         <p:spPr>
           <a:xfrm>
             <a:off x="566928" y="2286000"/>
-            <a:ext cx="5419192" cy="3017520"/>
+            <a:ext cx="5419192" cy="2816352"/>
           </a:xfrm>
           <a:prstGeom prst="rect">
             <a:avLst/>
@@ -20095,7 +20086,7 @@
         <p:spPr>
           <a:xfrm>
             <a:off x="841248" y="2852928"/>
-            <a:ext cx="4870552" cy="2331720"/>
+            <a:ext cx="4870552" cy="2148840"/>
           </a:xfrm>
           <a:prstGeom prst="rect">
             <a:avLst/>
@@ -20261,7 +20252,7 @@
         <p:spPr>
           <a:xfrm>
             <a:off x="6205576" y="2286000"/>
-            <a:ext cx="5419192" cy="3017520"/>
+            <a:ext cx="5419192" cy="2816352"/>
           </a:xfrm>
           <a:prstGeom prst="rect">
             <a:avLst/>
@@ -20325,7 +20316,7 @@
         <p:spPr>
           <a:xfrm>
             <a:off x="6479896" y="2852928"/>
-            <a:ext cx="4870552" cy="2331720"/>
+            <a:ext cx="4870552" cy="2148840"/>
           </a:xfrm>
           <a:prstGeom prst="rect">
             <a:avLst/>
@@ -20490,7 +20481,7 @@
         </p:nvSpPr>
         <p:spPr>
           <a:xfrm>
-            <a:off x="566928" y="5440680"/>
+            <a:off x="566928" y="5257800"/>
             <a:ext cx="11057839" cy="822960"/>
           </a:xfrm>
           <a:prstGeom prst="rect">
@@ -20530,7 +20521,7 @@
         </p:blipFill>
         <p:spPr>
           <a:xfrm>
-            <a:off x="804672" y="5660136"/>
+            <a:off x="804672" y="5477256"/>
             <a:ext cx="237744" cy="237744"/>
           </a:xfrm>
           <a:prstGeom prst="rect">
@@ -20546,7 +20537,7 @@
         </p:nvSpPr>
         <p:spPr>
           <a:xfrm>
-            <a:off x="1133856" y="5632704"/>
+            <a:off x="1133856" y="5449824"/>
             <a:ext cx="10234879" cy="292608"/>
           </a:xfrm>
           <a:prstGeom prst="rect">
@@ -20585,7 +20576,7 @@
         </p:nvSpPr>
         <p:spPr>
           <a:xfrm>
-            <a:off x="804672" y="5879592"/>
+            <a:off x="804672" y="5696712"/>
             <a:ext cx="10582351" cy="365760"/>
           </a:xfrm>
           <a:prstGeom prst="rect">
@@ -23395,7 +23386,7 @@
           </p:nvPr>
         </p:nvGraphicFramePr>
         <p:xfrm>
-          <a:off x="566928" y="2286000"/>
+          <a:off x="566928" y="2240280"/>
           <a:ext cx="11057839" cy="914400"/>
         </p:xfrm>
         <a:graphic>
@@ -23544,7 +23535,7 @@
                   </a:tcPr>
                 </a:tc>
               </a:tr>
-              <a:tr h="596189">
+              <a:tr h="504749">
                 <a:tc>
                   <a:txBody>
                     <a:bodyPr/>
@@ -23682,7 +23673,7 @@
                   </a:tcPr>
                 </a:tc>
               </a:tr>
-              <a:tr h="596189">
+              <a:tr h="504749">
                 <a:tc>
                   <a:txBody>
                     <a:bodyPr/>
@@ -23820,7 +23811,7 @@
                   </a:tcPr>
                 </a:tc>
               </a:tr>
-              <a:tr h="596189">
+              <a:tr h="504749">
                 <a:tc>
                   <a:txBody>
                     <a:bodyPr/>
@@ -23958,7 +23949,7 @@
                   </a:tcPr>
                 </a:tc>
               </a:tr>
-              <a:tr h="596189">
+              <a:tr h="504749">
                 <a:tc>
                   <a:txBody>
                     <a:bodyPr/>
@@ -24096,7 +24087,7 @@
                   </a:tcPr>
                 </a:tc>
               </a:tr>
-              <a:tr h="596189">
+              <a:tr h="504749">
                 <a:tc>
                   <a:txBody>
                     <a:bodyPr/>
@@ -24246,8 +24237,8 @@
         </p:nvSpPr>
         <p:spPr>
           <a:xfrm>
-            <a:off x="548640" y="2267712"/>
-            <a:ext cx="11094415" cy="3328416"/>
+            <a:off x="548640" y="2221992"/>
+            <a:ext cx="11094415" cy="2871216"/>
           </a:xfrm>
           <a:prstGeom prst="rect">
             <a:avLst/>
@@ -24268,8 +24259,8 @@
         </p:nvSpPr>
         <p:spPr>
           <a:xfrm>
-            <a:off x="566928" y="5669280"/>
-            <a:ext cx="11057839" cy="960120"/>
+            <a:off x="566928" y="5257800"/>
+            <a:ext cx="11057839" cy="868680"/>
           </a:xfrm>
           <a:prstGeom prst="rect">
             <a:avLst/>
@@ -24308,7 +24299,7 @@
         </p:blipFill>
         <p:spPr>
           <a:xfrm>
-            <a:off x="804672" y="5888736"/>
+            <a:off x="804672" y="5477256"/>
             <a:ext cx="237744" cy="237744"/>
           </a:xfrm>
           <a:prstGeom prst="rect">
@@ -24324,7 +24315,7 @@
         </p:nvSpPr>
         <p:spPr>
           <a:xfrm>
-            <a:off x="1133856" y="5861304"/>
+            <a:off x="1133856" y="5449824"/>
             <a:ext cx="10234879" cy="292608"/>
           </a:xfrm>
           <a:prstGeom prst="rect">
@@ -24363,7 +24354,7 @@
         </p:nvSpPr>
         <p:spPr>
           <a:xfrm>
-            <a:off x="804672" y="6181344"/>
+            <a:off x="804672" y="5769864"/>
             <a:ext cx="10582351" cy="411480"/>
           </a:xfrm>
           <a:prstGeom prst="rect">
@@ -27303,8 +27294,8 @@
         </p:nvSpPr>
         <p:spPr>
           <a:xfrm>
-            <a:off x="566928" y="2468880"/>
-            <a:ext cx="11057839" cy="841248"/>
+            <a:off x="566928" y="2423160"/>
+            <a:ext cx="11057839" cy="786384"/>
           </a:xfrm>
           <a:prstGeom prst="rect">
             <a:avLst/>
@@ -27328,7 +27319,7 @@
         </p:nvSpPr>
         <p:spPr>
           <a:xfrm>
-            <a:off x="841248" y="2560320"/>
+            <a:off x="841248" y="2514600"/>
             <a:ext cx="1737360" cy="310896"/>
           </a:xfrm>
           <a:prstGeom prst="rect">
@@ -27367,7 +27358,7 @@
         </p:nvSpPr>
         <p:spPr>
           <a:xfrm>
-            <a:off x="841248" y="2889504"/>
+            <a:off x="841248" y="2843784"/>
             <a:ext cx="4114800" cy="347472"/>
           </a:xfrm>
           <a:prstGeom prst="rect">
@@ -27406,7 +27397,7 @@
         </p:nvSpPr>
         <p:spPr>
           <a:xfrm>
-            <a:off x="5321808" y="2651760"/>
+            <a:off x="5321808" y="2606040"/>
             <a:ext cx="6028639" cy="594360"/>
           </a:xfrm>
           <a:prstGeom prst="rect">
@@ -27448,7 +27439,7 @@
         </p:nvSpPr>
         <p:spPr>
           <a:xfrm>
-            <a:off x="10253167" y="2560320"/>
+            <a:off x="10253167" y="2514600"/>
             <a:ext cx="1097280" cy="310896"/>
           </a:xfrm>
           <a:prstGeom prst="rect">
@@ -27487,8 +27478,8 @@
         </p:nvSpPr>
         <p:spPr>
           <a:xfrm>
-            <a:off x="566928" y="3456432"/>
-            <a:ext cx="11057839" cy="841248"/>
+            <a:off x="566928" y="3337560"/>
+            <a:ext cx="11057839" cy="786384"/>
           </a:xfrm>
           <a:prstGeom prst="rect">
             <a:avLst/>
@@ -27519,7 +27510,7 @@
         </p:nvSpPr>
         <p:spPr>
           <a:xfrm>
-            <a:off x="841248" y="3547872"/>
+            <a:off x="841248" y="3429000"/>
             <a:ext cx="1737360" cy="310896"/>
           </a:xfrm>
           <a:prstGeom prst="rect">
@@ -27558,7 +27549,7 @@
         </p:nvSpPr>
         <p:spPr>
           <a:xfrm>
-            <a:off x="841248" y="3877056"/>
+            <a:off x="841248" y="3758184"/>
             <a:ext cx="4114800" cy="347472"/>
           </a:xfrm>
           <a:prstGeom prst="rect">
@@ -27597,7 +27588,7 @@
         </p:nvSpPr>
         <p:spPr>
           <a:xfrm>
-            <a:off x="5321808" y="3639312"/>
+            <a:off x="5321808" y="3520440"/>
             <a:ext cx="6028639" cy="594360"/>
           </a:xfrm>
           <a:prstGeom prst="rect">
@@ -27639,8 +27630,8 @@
         </p:nvSpPr>
         <p:spPr>
           <a:xfrm>
-            <a:off x="566928" y="4443984"/>
-            <a:ext cx="11057839" cy="841248"/>
+            <a:off x="566928" y="4251960"/>
+            <a:ext cx="11057839" cy="786384"/>
           </a:xfrm>
           <a:prstGeom prst="rect">
             <a:avLst/>
@@ -27664,7 +27655,7 @@
         </p:nvSpPr>
         <p:spPr>
           <a:xfrm>
-            <a:off x="841248" y="4535424"/>
+            <a:off x="841248" y="4343400"/>
             <a:ext cx="1737360" cy="310896"/>
           </a:xfrm>
           <a:prstGeom prst="rect">
@@ -27703,7 +27694,7 @@
         </p:nvSpPr>
         <p:spPr>
           <a:xfrm>
-            <a:off x="841248" y="4864608"/>
+            <a:off x="841248" y="4672584"/>
             <a:ext cx="4114800" cy="347472"/>
           </a:xfrm>
           <a:prstGeom prst="rect">
@@ -27742,7 +27733,7 @@
         </p:nvSpPr>
         <p:spPr>
           <a:xfrm>
-            <a:off x="5321808" y="4626864"/>
+            <a:off x="5321808" y="4434840"/>
             <a:ext cx="6028639" cy="594360"/>
           </a:xfrm>
           <a:prstGeom prst="rect">
@@ -27784,8 +27775,8 @@
         </p:nvSpPr>
         <p:spPr>
           <a:xfrm>
-            <a:off x="566928" y="5440680"/>
-            <a:ext cx="11057839" cy="868680"/>
+            <a:off x="566928" y="5175504"/>
+            <a:ext cx="11057839" cy="950976"/>
           </a:xfrm>
           <a:prstGeom prst="rect">
             <a:avLst/>
@@ -27824,7 +27815,7 @@
         </p:blipFill>
         <p:spPr>
           <a:xfrm>
-            <a:off x="804672" y="5660136"/>
+            <a:off x="804672" y="5394960"/>
             <a:ext cx="237744" cy="237744"/>
           </a:xfrm>
           <a:prstGeom prst="rect">
@@ -27840,7 +27831,7 @@
         </p:nvSpPr>
         <p:spPr>
           <a:xfrm>
-            <a:off x="1133856" y="5632704"/>
+            <a:off x="1133856" y="5367528"/>
             <a:ext cx="10234879" cy="292608"/>
           </a:xfrm>
           <a:prstGeom prst="rect">
@@ -27879,8 +27870,8 @@
         </p:nvSpPr>
         <p:spPr>
           <a:xfrm>
-            <a:off x="804672" y="5879592"/>
-            <a:ext cx="10582351" cy="365760"/>
+            <a:off x="804672" y="5632704"/>
+            <a:ext cx="10582351" cy="457200"/>
           </a:xfrm>
           <a:prstGeom prst="rect">
             <a:avLst/>
@@ -30304,8 +30295,8 @@
         </p:nvSpPr>
         <p:spPr>
           <a:xfrm>
-            <a:off x="566928" y="5029200"/>
-            <a:ext cx="11057839" cy="1051560"/>
+            <a:off x="566928" y="4956048"/>
+            <a:ext cx="11057839" cy="1170432"/>
           </a:xfrm>
           <a:prstGeom prst="rect">
             <a:avLst/>
@@ -30344,7 +30335,7 @@
         </p:blipFill>
         <p:spPr>
           <a:xfrm>
-            <a:off x="804672" y="5248656"/>
+            <a:off x="804672" y="5175504"/>
             <a:ext cx="237744" cy="237744"/>
           </a:xfrm>
           <a:prstGeom prst="rect">
@@ -30360,7 +30351,7 @@
         </p:nvSpPr>
         <p:spPr>
           <a:xfrm>
-            <a:off x="1133856" y="5221224"/>
+            <a:off x="1133856" y="5148072"/>
             <a:ext cx="10234879" cy="292608"/>
           </a:xfrm>
           <a:prstGeom prst="rect">
@@ -30399,7 +30390,7 @@
         </p:nvSpPr>
         <p:spPr>
           <a:xfrm>
-            <a:off x="804672" y="5559552"/>
+            <a:off x="804672" y="5486400"/>
             <a:ext cx="10582351" cy="548640"/>
           </a:xfrm>
           <a:prstGeom prst="rect">
@@ -30737,8 +30728,8 @@
         </p:nvSpPr>
         <p:spPr>
           <a:xfrm>
-            <a:off x="566928" y="2423160"/>
-            <a:ext cx="11057839" cy="822960"/>
+            <a:off x="566928" y="2331720"/>
+            <a:ext cx="11057839" cy="731520"/>
           </a:xfrm>
           <a:prstGeom prst="rect">
             <a:avLst/>
@@ -30762,7 +30753,7 @@
         </p:nvSpPr>
         <p:spPr>
           <a:xfrm>
-            <a:off x="822960" y="2514600"/>
+            <a:off x="822960" y="2404872"/>
             <a:ext cx="3291840" cy="274320"/>
           </a:xfrm>
           <a:prstGeom prst="rect">
@@ -30801,8 +30792,8 @@
         </p:nvSpPr>
         <p:spPr>
           <a:xfrm>
-            <a:off x="822960" y="2807208"/>
-            <a:ext cx="10545775" cy="411480"/>
+            <a:off x="822960" y="2697480"/>
+            <a:ext cx="10545775" cy="329184"/>
           </a:xfrm>
           <a:prstGeom prst="rect">
             <a:avLst/>
@@ -30843,8 +30834,8 @@
         </p:nvSpPr>
         <p:spPr>
           <a:xfrm>
-            <a:off x="566928" y="3383280"/>
-            <a:ext cx="11057839" cy="822960"/>
+            <a:off x="566928" y="3200400"/>
+            <a:ext cx="11057839" cy="731520"/>
           </a:xfrm>
           <a:prstGeom prst="rect">
             <a:avLst/>
@@ -30868,7 +30859,7 @@
         </p:nvSpPr>
         <p:spPr>
           <a:xfrm>
-            <a:off x="822960" y="3474720"/>
+            <a:off x="822960" y="3273552"/>
             <a:ext cx="3291840" cy="274320"/>
           </a:xfrm>
           <a:prstGeom prst="rect">
@@ -30907,8 +30898,8 @@
         </p:nvSpPr>
         <p:spPr>
           <a:xfrm>
-            <a:off x="822960" y="3767328"/>
-            <a:ext cx="10545775" cy="411480"/>
+            <a:off x="822960" y="3566160"/>
+            <a:ext cx="10545775" cy="329184"/>
           </a:xfrm>
           <a:prstGeom prst="rect">
             <a:avLst/>
@@ -30949,8 +30940,8 @@
         </p:nvSpPr>
         <p:spPr>
           <a:xfrm>
-            <a:off x="566928" y="4343400"/>
-            <a:ext cx="11057839" cy="822960"/>
+            <a:off x="566928" y="4069080"/>
+            <a:ext cx="11057839" cy="731520"/>
           </a:xfrm>
           <a:prstGeom prst="rect">
             <a:avLst/>
@@ -30974,7 +30965,7 @@
         </p:nvSpPr>
         <p:spPr>
           <a:xfrm>
-            <a:off x="822960" y="4434840"/>
+            <a:off x="822960" y="4142232"/>
             <a:ext cx="3291840" cy="274320"/>
           </a:xfrm>
           <a:prstGeom prst="rect">
@@ -31013,8 +31004,8 @@
         </p:nvSpPr>
         <p:spPr>
           <a:xfrm>
-            <a:off x="822960" y="4727448"/>
-            <a:ext cx="10545775" cy="411480"/>
+            <a:off x="822960" y="4434840"/>
+            <a:ext cx="10545775" cy="329184"/>
           </a:xfrm>
           <a:prstGeom prst="rect">
             <a:avLst/>
@@ -31055,8 +31046,8 @@
         </p:nvSpPr>
         <p:spPr>
           <a:xfrm>
-            <a:off x="566928" y="5303520"/>
-            <a:ext cx="11057839" cy="822960"/>
+            <a:off x="566928" y="4937760"/>
+            <a:ext cx="11057839" cy="914400"/>
           </a:xfrm>
           <a:prstGeom prst="rect">
             <a:avLst/>
@@ -31087,7 +31078,7 @@
         </p:nvSpPr>
         <p:spPr>
           <a:xfrm>
-            <a:off x="822960" y="5394960"/>
+            <a:off x="822960" y="5010912"/>
             <a:ext cx="3291840" cy="274320"/>
           </a:xfrm>
           <a:prstGeom prst="rect">
@@ -31126,8 +31117,8 @@
         </p:nvSpPr>
         <p:spPr>
           <a:xfrm>
-            <a:off x="822960" y="5687568"/>
-            <a:ext cx="10545775" cy="411480"/>
+            <a:off x="822960" y="5303520"/>
+            <a:ext cx="10545775" cy="512064"/>
           </a:xfrm>
           <a:prstGeom prst="rect">
             <a:avLst/>
@@ -31168,8 +31159,8 @@
         </p:nvSpPr>
         <p:spPr>
           <a:xfrm>
-            <a:off x="566928" y="6355080"/>
-            <a:ext cx="11057839" cy="365760"/>
+            <a:off x="566928" y="5943600"/>
+            <a:ext cx="11057839" cy="274320"/>
           </a:xfrm>
           <a:prstGeom prst="rect">
             <a:avLst/>
@@ -31513,7 +31504,7 @@
           </p:nvPr>
         </p:nvGraphicFramePr>
         <p:xfrm>
-          <a:off x="566928" y="2331720"/>
+          <a:off x="566928" y="2240280"/>
           <a:ext cx="11057839" cy="914400"/>
         </p:xfrm>
         <a:graphic>
@@ -31662,7 +31653,7 @@
                   </a:tcPr>
                 </a:tc>
               </a:tr>
-              <a:tr h="614477">
+              <a:tr h="532181">
                 <a:tc>
                   <a:txBody>
                     <a:bodyPr/>
@@ -31800,7 +31791,7 @@
                   </a:tcPr>
                 </a:tc>
               </a:tr>
-              <a:tr h="614477">
+              <a:tr h="532181">
                 <a:tc>
                   <a:txBody>
                     <a:bodyPr/>
@@ -31938,7 +31929,7 @@
                   </a:tcPr>
                 </a:tc>
               </a:tr>
-              <a:tr h="614477">
+              <a:tr h="532181">
                 <a:tc>
                   <a:txBody>
                     <a:bodyPr/>
@@ -32076,7 +32067,7 @@
                   </a:tcPr>
                 </a:tc>
               </a:tr>
-              <a:tr h="614477">
+              <a:tr h="532181">
                 <a:tc>
                   <a:txBody>
                     <a:bodyPr/>
@@ -32214,7 +32205,7 @@
                   </a:tcPr>
                 </a:tc>
               </a:tr>
-              <a:tr h="614477">
+              <a:tr h="532181">
                 <a:tc>
                   <a:txBody>
                     <a:bodyPr/>
@@ -32364,8 +32355,8 @@
         </p:nvSpPr>
         <p:spPr>
           <a:xfrm>
-            <a:off x="548640" y="2313432"/>
-            <a:ext cx="11094415" cy="3419856"/>
+            <a:off x="548640" y="2221992"/>
+            <a:ext cx="11094415" cy="3008376"/>
           </a:xfrm>
           <a:prstGeom prst="rect">
             <a:avLst/>
@@ -32386,8 +32377,8 @@
         </p:nvSpPr>
         <p:spPr>
           <a:xfrm>
-            <a:off x="566928" y="5897880"/>
-            <a:ext cx="11057839" cy="822960"/>
+            <a:off x="566928" y="5394960"/>
+            <a:ext cx="11057839" cy="777240"/>
           </a:xfrm>
           <a:prstGeom prst="rect">
             <a:avLst/>
@@ -32426,7 +32417,7 @@
         </p:blipFill>
         <p:spPr>
           <a:xfrm>
-            <a:off x="804672" y="6117336"/>
+            <a:off x="804672" y="5614416"/>
             <a:ext cx="237744" cy="237744"/>
           </a:xfrm>
           <a:prstGeom prst="rect">
@@ -32442,7 +32433,7 @@
         </p:nvSpPr>
         <p:spPr>
           <a:xfrm>
-            <a:off x="1133856" y="6089904"/>
+            <a:off x="1133856" y="5586984"/>
             <a:ext cx="10234879" cy="292608"/>
           </a:xfrm>
           <a:prstGeom prst="rect">
@@ -32481,8 +32472,8 @@
         </p:nvSpPr>
         <p:spPr>
           <a:xfrm>
-            <a:off x="804672" y="6336792"/>
-            <a:ext cx="10582351" cy="365760"/>
+            <a:off x="804672" y="5870448"/>
+            <a:ext cx="10582351" cy="274320"/>
           </a:xfrm>
           <a:prstGeom prst="rect">
             <a:avLst/>
@@ -32823,7 +32814,7 @@
           </p:nvPr>
         </p:nvGraphicFramePr>
         <p:xfrm>
-          <a:off x="566928" y="2286000"/>
+          <a:off x="566928" y="2194560"/>
           <a:ext cx="11057839" cy="914400"/>
         </p:xfrm>
         <a:graphic>
@@ -32831,10 +32822,10 @@
             <a:tbl>
               <a:tblPr/>
               <a:tblGrid>
-                <a:gridCol w="3291840"/>
-                <a:gridCol w="2468880"/>
-                <a:gridCol w="2743200"/>
-                <a:gridCol w="2553919"/>
+                <a:gridCol w="3063240"/>
+                <a:gridCol w="2286000"/>
+                <a:gridCol w="2514600"/>
+                <a:gridCol w="3193999"/>
               </a:tblGrid>
               <a:tr h="310896">
                 <a:tc>
@@ -33110,7 +33101,7 @@
                   </a:tcPr>
                 </a:tc>
               </a:tr>
-              <a:tr h="577901">
+              <a:tr h="504749">
                 <a:tc>
                   <a:txBody>
                     <a:bodyPr/>
@@ -33384,7 +33375,7 @@
                   </a:tcPr>
                 </a:tc>
               </a:tr>
-              <a:tr h="577901">
+              <a:tr h="504749">
                 <a:tc>
                   <a:txBody>
                     <a:bodyPr/>
@@ -33658,7 +33649,7 @@
                   </a:tcPr>
                 </a:tc>
               </a:tr>
-              <a:tr h="577901">
+              <a:tr h="504749">
                 <a:tc>
                   <a:txBody>
                     <a:bodyPr/>
@@ -33932,7 +33923,7 @@
                   </a:tcPr>
                 </a:tc>
               </a:tr>
-              <a:tr h="577901">
+              <a:tr h="504749">
                 <a:tc>
                   <a:txBody>
                     <a:bodyPr/>
@@ -34206,7 +34197,7 @@
                   </a:tcPr>
                 </a:tc>
               </a:tr>
-              <a:tr h="577901">
+              <a:tr h="504749">
                 <a:tc>
                   <a:txBody>
                     <a:bodyPr/>
@@ -34492,8 +34483,8 @@
         </p:nvSpPr>
         <p:spPr>
           <a:xfrm>
-            <a:off x="548640" y="2267712"/>
-            <a:ext cx="11094415" cy="3236976"/>
+            <a:off x="548640" y="2176272"/>
+            <a:ext cx="11094415" cy="2871216"/>
           </a:xfrm>
           <a:prstGeom prst="rect">
             <a:avLst/>
@@ -34514,7 +34505,7 @@
         </p:nvSpPr>
         <p:spPr>
           <a:xfrm>
-            <a:off x="566928" y="5669280"/>
+            <a:off x="566928" y="5138928"/>
             <a:ext cx="11057839" cy="1051560"/>
           </a:xfrm>
           <a:prstGeom prst="rect">
@@ -34554,7 +34545,7 @@
         </p:blipFill>
         <p:spPr>
           <a:xfrm>
-            <a:off x="804672" y="5888736"/>
+            <a:off x="804672" y="5358384"/>
             <a:ext cx="237744" cy="237744"/>
           </a:xfrm>
           <a:prstGeom prst="rect">
@@ -34570,7 +34561,7 @@
         </p:nvSpPr>
         <p:spPr>
           <a:xfrm>
-            <a:off x="1133856" y="5861304"/>
+            <a:off x="1133856" y="5330952"/>
             <a:ext cx="10234879" cy="292608"/>
           </a:xfrm>
           <a:prstGeom prst="rect">
@@ -34609,7 +34600,7 @@
         </p:nvSpPr>
         <p:spPr>
           <a:xfrm>
-            <a:off x="804672" y="6199632"/>
+            <a:off x="804672" y="5669280"/>
             <a:ext cx="10582351" cy="548640"/>
           </a:xfrm>
           <a:prstGeom prst="rect">
